--- a/cursos/recursos/aperturas-y-defensas/04-defensa-caro-kann-solidez-para-negras.pptx
+++ b/cursos/recursos/aperturas-y-defensas/04-defensa-caro-kann-solidez-para-negras.pptx
@@ -1626,7 +1626,7 @@
                 <a:ea typeface="Calibri" pitchFamily="34" charset="-122"/>
                 <a:cs typeface="Calibri" pitchFamily="34" charset="-120"/>
               </a:rPr>
-              <a:t>Tras 2.d4 d5 3.Nc3 (o Nd2) dxe4 4.Nxe4, negras suele desarrollar con ...Bf5 antes de jugar ...e6, logrando una estructura sólida y equilibrada.</a:t>
+              <a:t>Tras 2.d4 d5 3.Cc3 (o Cd2) dxe4 4.Cxe4, negras suele desarrollar con ...Af5 antes de jugar ...e6, logrando una estructura sólida y equilibrada.</a:t>
             </a:r>
             <a:endParaRPr lang="en-US" sz="1600" dirty="0"/>
           </a:p>
